--- a/Investment_Product_Taxonomy_Walkthrough.pptx
+++ b/Investment_Product_Taxonomy_Walkthrough.pptx
@@ -125,7 +125,7 @@
   <p:extLst>
     <p:ext uri="{521415D9-36F7-43E2-AB2F-B90AF26B5E84}">
       <p14:sectionLst xmlns:p14="http://schemas.microsoft.com/office/powerpoint/2010/main">
-        <p14:section name="Overview" id="{45bf8a27-3477-7733-ebcf-47619b70489b}">
+        <p14:section name="Overview" id="{6cc912b2-76e5-a640-943d-574e9b89f456}">
           <p14:sldIdLst>
             <p14:sldId id="256"/>
             <p14:sldId id="257"/>
@@ -133,7 +133,7 @@
             <p14:sldId id="259"/>
           </p14:sldIdLst>
         </p14:section>
-        <p14:section name="What is included" id="{4941e186-e504-e022-bd6f-b73c1f03133f}">
+        <p14:section name="What is included" id="{8bce75c5-c4a7-338d-19f9-0e227e7420aa}">
           <p14:sldIdLst>
             <p14:sldId id="260"/>
             <p14:sldId id="261"/>
@@ -142,20 +142,20 @@
             <p14:sldId id="264"/>
           </p14:sldIdLst>
         </p14:section>
-        <p14:section name="What is excluded" id="{b45d2f3c-6daf-b4da-3c42-9a2d8f3400a5}">
+        <p14:section name="What is excluded" id="{9e7db702-3298-6dca-f0a4-9ec49fdb03c1}">
           <p14:sldIdLst>
             <p14:sldId id="265"/>
             <p14:sldId id="266"/>
             <p14:sldId id="267"/>
           </p14:sldIdLst>
         </p14:section>
-        <p14:section name="How it is used" id="{a3837ba1-ca8a-e36f-8425-281fc387d219}">
+        <p14:section name="How it is used" id="{e8b44134-a1af-8754-43e1-e04f5d63099b}">
           <p14:sldIdLst>
             <p14:sldId id="268"/>
             <p14:sldId id="269"/>
           </p14:sldIdLst>
         </p14:section>
-        <p14:section name="Data products" id="{d76b9001-b2a4-a499-c284-c6416d65be84}">
+        <p14:section name="Data products" id="{71812a33-4052-8814-6b54-f87234ab6bb5}">
           <p14:sldIdLst>
             <p14:sldId id="270"/>
             <p14:sldId id="271"/>
@@ -163,7 +163,7 @@
             <p14:sldId id="273"/>
           </p14:sldIdLst>
         </p14:section>
-        <p14:section name="Next steps" id="{5f399fd1-688b-e03a-6986-1e580c1dfbf8}">
+        <p14:section name="Next steps" id="{3d6eb895-28eb-9ec6-b186-30be2d356f90}">
           <p14:sldIdLst>
             <p14:sldId id="274"/>
           </p14:sldIdLst>
@@ -301,7 +301,7 @@
                 <c:formatCode>General</c:formatCode>
                 <c:ptCount val="7"/>
                 <c:pt idx="0">
-                  <c:v>104</c:v>
+                  <c:v>124</c:v>
                 </c:pt>
                 <c:pt idx="1">
                   <c:v>67</c:v>
@@ -481,7 +481,7 @@
                 </a:solidFill>
                 <a:latin typeface="+mn-lt"/>
               </a:rPr>
-              <a:t>Products reading each object (top 8 of 46)</a:t>
+              <a:t>Products reading each object (top 8 of 48)</a:t>
             </a:r>
           </a:p>
         </c:rich>
@@ -505,7 +505,7 @@
               <c:strCache>
                 <c:ptCount val="1"/>
                 <c:pt idx="0">
-                  <c:v>Products reading each object (top 8 of 46)</c:v>
+                  <c:v>Products reading each object (top 8 of 48)</c:v>
                 </c:pt>
               </c:strCache>
             </c:strRef>
@@ -1310,7 +1310,7 @@
           <a:p>
             <a:r>
               <a:rPr lang="en-US" dirty="0"/>
-              <a:t>Every attribute carries an ownership flag. 269 of the 287 are mastered in Investment Product. 14 are references, which hold only the ID of a record mastered in another domain. 4 are derived copies, shown for convenience and never edited here. Record Metadata, the seven governance attributes such as data owner and system of record, is excluded from every taxonomy view and documented separately by the program.</a:t>
+              <a:t>Every attribute carries an ownership flag. 287 of the 307 are mastered in Investment Product. 16 are references, which hold only the ID of a record mastered in another domain. 4 are derived copies, shown for convenience and never edited here. Record Metadata, the seven governance attributes such as data owner and system of record, is excluded from every taxonomy view and documented separately by the program.</a:t>
             </a:r>
             <a:endParaRPr lang="en-US" dirty="0"/>
           </a:p>
@@ -1486,7 +1486,7 @@
           <a:p>
             <a:r>
               <a:rPr lang="en-US" dirty="0"/>
-              <a:t>The taxonomy is used in four ways. First, it is the target that every product source is mapped to. That mapping to the firm's actual systems is Phase D and has not been done. Second, it is the bill of materials for data products: each product lists the exact attributes it uses, and the build fails if one does not exist. Third, product and share class are published once as shared dimensions in the semantic layer. Fourth, the ownership flags and the 91 proposed critical data elements tell stewards where to focus.</a:t>
+              <a:t>The taxonomy is used in four ways. First, it is the target that every product source is mapped to. That mapping to the firm's actual systems is Phase D and has not been done. Second, it is the bill of materials for data products: each product lists the exact attributes it uses, and the build fails if one does not exist. Third, product and share class are published once as shared dimensions in the semantic layer. Fourth, the ownership flags and the 99 proposed critical data elements tell stewards where to focus.</a:t>
             </a:r>
             <a:endParaRPr lang="en-US" dirty="0"/>
           </a:p>
@@ -1574,7 +1574,7 @@
           <a:p>
             <a:r>
               <a:rPr lang="en-US" dirty="0"/>
-              <a:t>DP-004, Product and Share Class Distribution Reference, is the foundational data product for this domain. It takes 97 attributes from 20 of the 46 objects and conforms identifiers and source system codes once, so that transactions, positions, agreements, shelf placements and reports all refer to the same share class. 69 other products name it as a direct upstream, and 87 of the other 91 depend on it directly or indirectly. Lifecycle events that are approved but not yet announced are withheld until the announcement date.</a:t>
+              <a:t>DP-004, Product and Share Class Distribution Reference, is the foundational data product for this domain. It takes 97 attributes from 20 of the 48 objects and conforms identifiers and source system codes once, so that transactions, positions, agreements, shelf placements and reports all refer to the same share class. 69 other products name it as a direct upstream, and 87 of the other 91 depend on it directly or indirectly. Lifecycle events that are approved but not yet announced are withheld until the announcement date.</a:t>
             </a:r>
             <a:endParaRPr lang="en-US" dirty="0"/>
           </a:p>
@@ -1662,7 +1662,7 @@
           <a:p>
             <a:r>
               <a:rPr lang="en-US" dirty="0"/>
-              <a:t>32 of the 92 specified data products list Investment Product objects among their inputs: 2 foundational and 30 consumer-aligned. Every one of the 46 objects is used by at least one product, and 242 of the 287 attributes, 84 percent, appear in a product specification. Share Class is by far the most used object, read by 21 products. Regulatory and control products are the largest group, which reflects how much product data regulators require distributors and manufacturers to exchange.</a:t>
+              <a:t>32 of the 92 specified data products list Investment Product objects among their inputs: 2 foundational and 30 consumer-aligned. 46 of the 48 objects are used by at least one product; the two that are not are the new commentary objects, which no product reads yet. 242 of the 307 attributes, 79 percent, appear in a product specification. Share Class is by far the most used object, read by 21 products. Regulatory and control products are the largest group, which reflects how much product data regulators require distributors and manufacturers to exchange.</a:t>
             </a:r>
             <a:endParaRPr lang="en-US" dirty="0"/>
           </a:p>
@@ -2366,7 +2366,7 @@
           <a:p>
             <a:r>
               <a:rPr lang="en-US" dirty="0"/>
-              <a:t>The domain has 13 data families. For this walkthrough they are grouped in three: the spine, which is strategy, vehicle and share class; identity, classification and terms; and operations, distribution and governance. The three-way grouping is a presentation aid and is not a level in the taxonomy. The next three slides take each group in turn.</a:t>
+              <a:t>The domain has 14 data families. For this walkthrough they are grouped in three: the spine, which is strategy, vehicle and share class; identity, classification and terms; and operations, distribution and governance, which now includes the market and investment commentary written by the investment teams. The three-way grouping is a presentation aid and is not a level in the taxonomy. The next three slides take each group in turn.</a:t>
             </a:r>
             <a:endParaRPr lang="en-US" dirty="0"/>
           </a:p>
@@ -2630,7 +2630,7 @@
           <a:p>
             <a:r>
               <a:rPr lang="en-US" dirty="0"/>
-              <a:t>Five families, 85 attributes. Dealing, Valuation and Listing holds the operational terms an intermediary needs to trade. Parties and Roles records which service providers and portfolio managers serve each product over time. Distribution and Registration records where and to whom a share class may be sold, including the MiFID II target market. Regulatory, Tax and Disclosure holds authorization, documents and tax status. Lifecycle and Governance records events such as launches, closures and mergers, and the product review cycle.</a:t>
+              <a:t>Six families, 105 attributes. Dealing, Valuation and Listing holds the operational terms an intermediary needs to trade. Parties and Roles records which service providers and portfolio managers serve each product over time. Distribution and Registration records where and to whom a share class may be sold, including the MiFID II target market. Regulatory, Tax and Disclosure holds authorization, documents and tax status. Investment Commentary is the source record of the market and investment commentary the investment teams write for each period; the published pieces stay in Marketing &amp; Digital and client reports in Institutional Client Servicing &amp; Reporting, and both point back to it. Lifecycle and Governance records events such as launches, closures and mergers, and the product review cycle.</a:t>
             </a:r>
             <a:endParaRPr lang="en-US" dirty="0"/>
           </a:p>
@@ -2718,7 +2718,7 @@
           <a:p>
             <a:r>
               <a:rPr lang="en-US" dirty="0"/>
-              <a:t>Each attribute definition names the standard or source it is aligned to. 183 of the 287 attributes, 64 percent, align to an external standard or regulation. openfunds is the largest single source. 104 attributes are firm-defined because no authoritative external definition exists. 94 attributes take their values from a controlled code list. The exact field-level mapping to openfunds and FinDatEx field IDs is a Phase D task and has not been done.</a:t>
+              <a:t>Each attribute definition names the standard or source it is aligned to. 183 of the 307 attributes, 60 percent, align to an external standard or regulation. openfunds is the largest single source. 124 attributes are firm-defined because no authoritative external definition exists. 101 attributes take their values from a controlled code list. The exact field-level mapping to openfunds and FinDatEx field IDs is a Phase D task and has not been done.</a:t>
             </a:r>
             <a:endParaRPr lang="en-US" dirty="0"/>
           </a:p>
@@ -5330,7 +5330,7 @@
                   <a:schemeClr val="tx1"/>
                 </a:solidFill>
               </a:rPr>
-              <a:t>269 attributes mastered, 18 borrowed</a:t>
+              <a:t>287 attributes mastered, 20 borrowed</a:t>
             </a:r>
             <a:endParaRPr lang="en-US" sz="3600" dirty="0"/>
           </a:p>
@@ -5388,7 +5388,7 @@
                   <a:schemeClr val="accent6"/>
                 </a:solidFill>
               </a:rPr>
-              <a:t>269</a:t>
+              <a:t>287</a:t>
             </a:r>
             <a:endParaRPr lang="en-US" sz="6000" dirty="0"/>
           </a:p>
@@ -5424,7 +5424,7 @@
                   <a:schemeClr val="bg1"/>
                 </a:solidFill>
               </a:rPr>
-              <a:t>of 287 attributes are mastered in Investment Product</a:t>
+              <a:t>of 307 attributes are mastered in Investment Product</a:t>
             </a:r>
             <a:endParaRPr lang="en-US" sz="1400" dirty="0"/>
           </a:p>
@@ -5460,7 +5460,7 @@
                   <a:schemeClr val="bg1"/>
                 </a:solidFill>
               </a:rPr>
-              <a:t>14 references</a:t>
+              <a:t>16 references</a:t>
             </a:r>
             <a:endParaRPr lang="en-US" sz="1600" dirty="0"/>
           </a:p>
@@ -5662,7 +5662,7 @@
                   <a:schemeClr val="accent1"/>
                 </a:solidFill>
               </a:rPr>
-              <a:t>7 references</a:t>
+              <a:t>9 references</a:t>
             </a:r>
             <a:endParaRPr lang="en-US" sz="1200" dirty="0"/>
           </a:p>
@@ -5698,7 +5698,7 @@
                   <a:schemeClr val="tx1"/>
                 </a:solidFill>
               </a:rPr>
-              <a:t>Investment team, portfolio managers, boutique, product owner, governing body, dealing calendar</a:t>
+              <a:t>Investment team, portfolio managers, commentary author and sign-off, boutique, product owner, governing body, dealing calendar</a:t>
             </a:r>
             <a:endParaRPr lang="en-US" sz="1100" dirty="0"/>
           </a:p>
@@ -8138,7 +8138,7 @@
                   <a:schemeClr val="tx1"/>
                 </a:solidFill>
               </a:rPr>
-              <a:t>A named owning domain for every attribute and 91 proposed critical data elements show stewards where to put data quality effort.</a:t>
+              <a:t>A named owning domain for every attribute and 99 proposed critical data elements show stewards where to put data quality effort.</a:t>
             </a:r>
             <a:endParaRPr lang="en-US" sz="1300" dirty="0"/>
           </a:p>
@@ -8982,7 +8982,7 @@
                   <a:schemeClr val="tx1"/>
                 </a:solidFill>
               </a:rPr>
-              <a:t>97 attributes from 20 of the 46 Investment Product objects</a:t>
+              <a:t>97 attributes from 20 of the 48 Investment Product objects</a:t>
             </a:r>
             <a:endParaRPr lang="en-US" sz="1300" dirty="0"/>
           </a:p>
@@ -9899,7 +9899,7 @@
                   <a:schemeClr val="accent1"/>
                 </a:solidFill>
               </a:rPr>
-              <a:t>46 of 46</a:t>
+              <a:t>46 of 48</a:t>
             </a:r>
             <a:endParaRPr lang="en-US" sz="2800" dirty="0"/>
           </a:p>
@@ -9935,7 +9935,7 @@
                   <a:schemeClr val="tx1"/>
                 </a:solidFill>
               </a:rPr>
-              <a:t>objects are used by at least one product</a:t>
+              <a:t>objects are used by a product; the two commentary objects are not yet</a:t>
             </a:r>
             <a:endParaRPr lang="en-US" sz="1200" dirty="0"/>
           </a:p>
@@ -9993,7 +9993,7 @@
                   <a:schemeClr val="accent1"/>
                 </a:solidFill>
               </a:rPr>
-              <a:t>84%</a:t>
+              <a:t>79%</a:t>
             </a:r>
             <a:endParaRPr lang="en-US" sz="2800" dirty="0"/>
           </a:p>
@@ -10029,7 +10029,7 @@
                   <a:schemeClr val="tx1"/>
                 </a:solidFill>
               </a:rPr>
-              <a:t>of attributes (242 of 287) appear in a product specification</a:t>
+              <a:t>of attributes (242 of 307) appear in a product specification</a:t>
             </a:r>
             <a:endParaRPr lang="en-US" sz="1200" dirty="0"/>
           </a:p>
@@ -14453,7 +14453,7 @@
                   <a:schemeClr val="tx1"/>
                 </a:solidFill>
               </a:rPr>
-              <a:t>Validate the families, objects and 91 proposed critical data elements with Product, Distribution, Legal and Compliance, and Operations</a:t>
+              <a:t>Validate the families, objects and 99 proposed critical data elements with Product, Distribution, Legal and Compliance, and Operations</a:t>
             </a:r>
             <a:endParaRPr lang="en-US" sz="1300" dirty="0"/>
           </a:p>
@@ -14953,7 +14953,7 @@
                   <a:schemeClr val="accent6"/>
                 </a:solidFill>
               </a:rPr>
-              <a:t>13</a:t>
+              <a:t>14</a:t>
             </a:r>
             <a:endParaRPr lang="en-US" sz="3600" dirty="0"/>
           </a:p>
@@ -15025,7 +15025,7 @@
                   <a:schemeClr val="accent6"/>
                 </a:solidFill>
               </a:rPr>
-              <a:t>46</a:t>
+              <a:t>48</a:t>
             </a:r>
             <a:endParaRPr lang="en-US" sz="3600" dirty="0"/>
           </a:p>
@@ -15097,7 +15097,7 @@
                   <a:schemeClr val="accent6"/>
                 </a:solidFill>
               </a:rPr>
-              <a:t>287</a:t>
+              <a:t>307</a:t>
             </a:r>
             <a:endParaRPr lang="en-US" sz="3600" dirty="0"/>
           </a:p>
@@ -15169,7 +15169,7 @@
                   <a:schemeClr val="accent6"/>
                 </a:solidFill>
               </a:rPr>
-              <a:t>91</a:t>
+              <a:t>99</a:t>
             </a:r>
             <a:endParaRPr lang="en-US" sz="3600" dirty="0"/>
           </a:p>
@@ -15337,7 +15337,7 @@
                   <a:schemeClr val="tx1"/>
                 </a:solidFill>
               </a:rPr>
-              <a:t>Strategies, products and vehicles, share classes, and the reference data that describes them: identifiers, classifications, fees, dealing terms, registrations, documents and lifecycle.</a:t>
+              <a:t>Strategies, products and vehicles, share classes, and the reference data that describes them: identifiers, classifications, fees, dealing terms, registrations, documents, commentary and lifecycle.</a:t>
             </a:r>
             <a:endParaRPr lang="en-US" sz="1300" dirty="0"/>
           </a:p>
@@ -16183,7 +16183,7 @@
                   <a:schemeClr val="tx2"/>
                 </a:solidFill>
               </a:rPr>
-              <a:t>13 families</a:t>
+              <a:t>14 families</a:t>
             </a:r>
             <a:endParaRPr lang="en-US" sz="1200" dirty="0"/>
           </a:p>
@@ -16353,7 +16353,7 @@
                   <a:schemeClr val="tx2"/>
                 </a:solidFill>
               </a:rPr>
-              <a:t>46 objects</a:t>
+              <a:t>48 objects</a:t>
             </a:r>
             <a:endParaRPr lang="en-US" sz="1200" dirty="0"/>
           </a:p>
@@ -16523,7 +16523,7 @@
                   <a:schemeClr val="tx2"/>
                 </a:solidFill>
               </a:rPr>
-              <a:t>287 attributes</a:t>
+              <a:t>307 attributes</a:t>
             </a:r>
             <a:endParaRPr lang="en-US" sz="1200" dirty="0"/>
           </a:p>
@@ -17887,7 +17887,7 @@
                   <a:schemeClr val="tx1"/>
                 </a:solidFill>
               </a:rPr>
-              <a:t>Most classification is set at Strategy and inherited by Product. Most commercial terms (fees, currency, registration, identifiers) sit at Share Class: 110 of the 287 attributes apply to share class alone, and 86 to product alone.</a:t>
+              <a:t>Most classification is set at Strategy and inherited by Product. Most commercial terms (fees, currency, registration, identifiers) sit at Share Class: 110 of the 307 attributes apply to share class alone, and 86 to product alone.</a:t>
             </a:r>
             <a:endParaRPr lang="en-US" sz="1400" dirty="0"/>
           </a:p>
@@ -17995,7 +17995,7 @@
                   <a:schemeClr val="accent1"/>
                 </a:solidFill>
               </a:rPr>
-              <a:t>WHAT IS INCLUDED  |  THE 13 FAMILIES</a:t>
+              <a:t>WHAT IS INCLUDED  |  THE 14 FAMILIES</a:t>
             </a:r>
             <a:endParaRPr lang="en-US" sz="1200" dirty="0"/>
           </a:p>
@@ -18033,7 +18033,7 @@
                   <a:schemeClr val="tx1"/>
                 </a:solidFill>
               </a:rPr>
-              <a:t>Thirteen families in three groups</a:t>
+              <a:t>Fourteen families in three groups</a:t>
             </a:r>
             <a:endParaRPr lang="en-US" sz="3600" dirty="0"/>
           </a:p>
@@ -18142,11 +18142,11 @@
         <p:spPr>
           <a:xfrm>
             <a:off x="548640" y="2697480"/>
-            <a:ext cx="3511296" cy="612648"/>
+            <a:ext cx="3511296" cy="521208"/>
           </a:xfrm>
           <a:prstGeom prst="roundRect">
             <a:avLst>
-              <a:gd name="adj" fmla="val 11940"/>
+              <a:gd name="adj" fmla="val 14035"/>
             </a:avLst>
           </a:prstGeom>
           <a:solidFill>
@@ -18163,8 +18163,8 @@
         </p:nvSpPr>
         <p:spPr>
           <a:xfrm>
-            <a:off x="731520" y="2752344"/>
-            <a:ext cx="3145536" cy="274320"/>
+            <a:off x="731520" y="2734056"/>
+            <a:ext cx="3145536" cy="256032"/>
           </a:xfrm>
           <a:prstGeom prst="rect">
             <a:avLst/>
@@ -18199,8 +18199,8 @@
         </p:nvSpPr>
         <p:spPr>
           <a:xfrm>
-            <a:off x="731520" y="3017520"/>
-            <a:ext cx="3145536" cy="237744"/>
+            <a:off x="731520" y="2971800"/>
+            <a:ext cx="3145536" cy="219456"/>
           </a:xfrm>
           <a:prstGeom prst="rect">
             <a:avLst/>
@@ -18235,12 +18235,12 @@
         </p:nvSpPr>
         <p:spPr>
           <a:xfrm>
-            <a:off x="548640" y="3410712"/>
-            <a:ext cx="3511296" cy="612648"/>
+            <a:off x="548640" y="3300984"/>
+            <a:ext cx="3511296" cy="521208"/>
           </a:xfrm>
           <a:prstGeom prst="roundRect">
             <a:avLst>
-              <a:gd name="adj" fmla="val 11940"/>
+              <a:gd name="adj" fmla="val 14035"/>
             </a:avLst>
           </a:prstGeom>
           <a:solidFill>
@@ -18257,8 +18257,8 @@
         </p:nvSpPr>
         <p:spPr>
           <a:xfrm>
-            <a:off x="731520" y="3465576"/>
-            <a:ext cx="3145536" cy="274320"/>
+            <a:off x="731520" y="3337560"/>
+            <a:ext cx="3145536" cy="256032"/>
           </a:xfrm>
           <a:prstGeom prst="rect">
             <a:avLst/>
@@ -18293,8 +18293,8 @@
         </p:nvSpPr>
         <p:spPr>
           <a:xfrm>
-            <a:off x="731520" y="3730752"/>
-            <a:ext cx="3145536" cy="237744"/>
+            <a:off x="731520" y="3575304"/>
+            <a:ext cx="3145536" cy="219456"/>
           </a:xfrm>
           <a:prstGeom prst="rect">
             <a:avLst/>
@@ -18329,12 +18329,12 @@
         </p:nvSpPr>
         <p:spPr>
           <a:xfrm>
-            <a:off x="548640" y="4123944"/>
-            <a:ext cx="3511296" cy="612648"/>
+            <a:off x="548640" y="3904488"/>
+            <a:ext cx="3511296" cy="521208"/>
           </a:xfrm>
           <a:prstGeom prst="roundRect">
             <a:avLst>
-              <a:gd name="adj" fmla="val 11940"/>
+              <a:gd name="adj" fmla="val 14035"/>
             </a:avLst>
           </a:prstGeom>
           <a:solidFill>
@@ -18351,44 +18351,44 @@
         </p:nvSpPr>
         <p:spPr>
           <a:xfrm>
+            <a:off x="731520" y="3941064"/>
+            <a:ext cx="3145536" cy="256032"/>
+          </a:xfrm>
+          <a:prstGeom prst="rect">
+            <a:avLst/>
+          </a:prstGeom>
+          <a:noFill/>
+          <a:ln/>
+        </p:spPr>
+        <p:txBody>
+          <a:bodyPr wrap="square" lIns="0" tIns="0" rIns="0" bIns="0" rtlCol="0" anchor="ctr"/>
+          <a:lstStyle/>
+          <a:p>
+            <a:pPr algn="l" indent="0" marL="0">
+              <a:buNone/>
+            </a:pPr>
+            <a:r>
+              <a:rPr lang="en-US" sz="1300" b="1" dirty="0">
+                <a:solidFill>
+                  <a:schemeClr val="tx1"/>
+                </a:solidFill>
+              </a:rPr>
+              <a:t>Share Class</a:t>
+            </a:r>
+            <a:endParaRPr lang="en-US" sz="1300" dirty="0"/>
+          </a:p>
+        </p:txBody>
+      </p:sp>
+      <p:sp>
+        <p:nvSpPr>
+          <p:cNvPr id="16" name="Text 13"/>
+          <p:cNvSpPr txBox="1"/>
+          <p:nvPr/>
+        </p:nvSpPr>
+        <p:spPr>
+          <a:xfrm>
             <a:off x="731520" y="4178808"/>
-            <a:ext cx="3145536" cy="274320"/>
-          </a:xfrm>
-          <a:prstGeom prst="rect">
-            <a:avLst/>
-          </a:prstGeom>
-          <a:noFill/>
-          <a:ln/>
-        </p:spPr>
-        <p:txBody>
-          <a:bodyPr wrap="square" lIns="0" tIns="0" rIns="0" bIns="0" rtlCol="0" anchor="ctr"/>
-          <a:lstStyle/>
-          <a:p>
-            <a:pPr algn="l" indent="0" marL="0">
-              <a:buNone/>
-            </a:pPr>
-            <a:r>
-              <a:rPr lang="en-US" sz="1300" b="1" dirty="0">
-                <a:solidFill>
-                  <a:schemeClr val="tx1"/>
-                </a:solidFill>
-              </a:rPr>
-              <a:t>Share Class</a:t>
-            </a:r>
-            <a:endParaRPr lang="en-US" sz="1300" dirty="0"/>
-          </a:p>
-        </p:txBody>
-      </p:sp>
-      <p:sp>
-        <p:nvSpPr>
-          <p:cNvPr id="16" name="Text 13"/>
-          <p:cNvSpPr txBox="1"/>
-          <p:nvPr/>
-        </p:nvSpPr>
-        <p:spPr>
-          <a:xfrm>
-            <a:off x="731520" y="4443984"/>
-            <a:ext cx="3145536" cy="237744"/>
+            <a:ext cx="3145536" cy="219456"/>
           </a:xfrm>
           <a:prstGeom prst="rect">
             <a:avLst/>
@@ -18518,11 +18518,11 @@
         <p:spPr>
           <a:xfrm>
             <a:off x="4338828" y="2697480"/>
-            <a:ext cx="3511296" cy="612648"/>
+            <a:ext cx="3511296" cy="521208"/>
           </a:xfrm>
           <a:prstGeom prst="roundRect">
             <a:avLst>
-              <a:gd name="adj" fmla="val 11940"/>
+              <a:gd name="adj" fmla="val 14035"/>
             </a:avLst>
           </a:prstGeom>
           <a:solidFill>
@@ -18539,8 +18539,8 @@
         </p:nvSpPr>
         <p:spPr>
           <a:xfrm>
-            <a:off x="4521708" y="2752344"/>
-            <a:ext cx="3145536" cy="274320"/>
+            <a:off x="4521708" y="2734056"/>
+            <a:ext cx="3145536" cy="256032"/>
           </a:xfrm>
           <a:prstGeom prst="rect">
             <a:avLst/>
@@ -18575,8 +18575,8 @@
         </p:nvSpPr>
         <p:spPr>
           <a:xfrm>
-            <a:off x="4521708" y="3017520"/>
-            <a:ext cx="3145536" cy="237744"/>
+            <a:off x="4521708" y="2971800"/>
+            <a:ext cx="3145536" cy="219456"/>
           </a:xfrm>
           <a:prstGeom prst="rect">
             <a:avLst/>
@@ -18611,12 +18611,12 @@
         </p:nvSpPr>
         <p:spPr>
           <a:xfrm>
-            <a:off x="4338828" y="3410712"/>
-            <a:ext cx="3511296" cy="612648"/>
+            <a:off x="4338828" y="3300984"/>
+            <a:ext cx="3511296" cy="521208"/>
           </a:xfrm>
           <a:prstGeom prst="roundRect">
             <a:avLst>
-              <a:gd name="adj" fmla="val 11940"/>
+              <a:gd name="adj" fmla="val 14035"/>
             </a:avLst>
           </a:prstGeom>
           <a:solidFill>
@@ -18633,8 +18633,8 @@
         </p:nvSpPr>
         <p:spPr>
           <a:xfrm>
-            <a:off x="4521708" y="3465576"/>
-            <a:ext cx="3145536" cy="274320"/>
+            <a:off x="4521708" y="3337560"/>
+            <a:ext cx="3145536" cy="256032"/>
           </a:xfrm>
           <a:prstGeom prst="rect">
             <a:avLst/>
@@ -18669,8 +18669,8 @@
         </p:nvSpPr>
         <p:spPr>
           <a:xfrm>
-            <a:off x="4521708" y="3730752"/>
-            <a:ext cx="3145536" cy="237744"/>
+            <a:off x="4521708" y="3575304"/>
+            <a:ext cx="3145536" cy="219456"/>
           </a:xfrm>
           <a:prstGeom prst="rect">
             <a:avLst/>
@@ -18705,12 +18705,12 @@
         </p:nvSpPr>
         <p:spPr>
           <a:xfrm>
-            <a:off x="4338828" y="4123944"/>
-            <a:ext cx="3511296" cy="612648"/>
+            <a:off x="4338828" y="3904488"/>
+            <a:ext cx="3511296" cy="521208"/>
           </a:xfrm>
           <a:prstGeom prst="roundRect">
             <a:avLst>
-              <a:gd name="adj" fmla="val 11940"/>
+              <a:gd name="adj" fmla="val 14035"/>
             </a:avLst>
           </a:prstGeom>
           <a:solidFill>
@@ -18727,44 +18727,44 @@
         </p:nvSpPr>
         <p:spPr>
           <a:xfrm>
+            <a:off x="4521708" y="3941064"/>
+            <a:ext cx="3145536" cy="256032"/>
+          </a:xfrm>
+          <a:prstGeom prst="rect">
+            <a:avLst/>
+          </a:prstGeom>
+          <a:noFill/>
+          <a:ln/>
+        </p:spPr>
+        <p:txBody>
+          <a:bodyPr wrap="square" lIns="0" tIns="0" rIns="0" bIns="0" rtlCol="0" anchor="ctr"/>
+          <a:lstStyle/>
+          <a:p>
+            <a:pPr algn="l" indent="0" marL="0">
+              <a:buNone/>
+            </a:pPr>
+            <a:r>
+              <a:rPr lang="en-US" sz="1300" b="1" dirty="0">
+                <a:solidFill>
+                  <a:schemeClr val="tx1"/>
+                </a:solidFill>
+              </a:rPr>
+              <a:t>Investment Policy &amp; Risk</a:t>
+            </a:r>
+            <a:endParaRPr lang="en-US" sz="1300" dirty="0"/>
+          </a:p>
+        </p:txBody>
+      </p:sp>
+      <p:sp>
+        <p:nvSpPr>
+          <p:cNvPr id="28" name="Text 25"/>
+          <p:cNvSpPr txBox="1"/>
+          <p:nvPr/>
+        </p:nvSpPr>
+        <p:spPr>
+          <a:xfrm>
             <a:off x="4521708" y="4178808"/>
-            <a:ext cx="3145536" cy="274320"/>
-          </a:xfrm>
-          <a:prstGeom prst="rect">
-            <a:avLst/>
-          </a:prstGeom>
-          <a:noFill/>
-          <a:ln/>
-        </p:spPr>
-        <p:txBody>
-          <a:bodyPr wrap="square" lIns="0" tIns="0" rIns="0" bIns="0" rtlCol="0" anchor="ctr"/>
-          <a:lstStyle/>
-          <a:p>
-            <a:pPr algn="l" indent="0" marL="0">
-              <a:buNone/>
-            </a:pPr>
-            <a:r>
-              <a:rPr lang="en-US" sz="1300" b="1" dirty="0">
-                <a:solidFill>
-                  <a:schemeClr val="tx1"/>
-                </a:solidFill>
-              </a:rPr>
-              <a:t>Investment Policy &amp; Risk</a:t>
-            </a:r>
-            <a:endParaRPr lang="en-US" sz="1300" dirty="0"/>
-          </a:p>
-        </p:txBody>
-      </p:sp>
-      <p:sp>
-        <p:nvSpPr>
-          <p:cNvPr id="28" name="Text 25"/>
-          <p:cNvSpPr txBox="1"/>
-          <p:nvPr/>
-        </p:nvSpPr>
-        <p:spPr>
-          <a:xfrm>
-            <a:off x="4521708" y="4443984"/>
-            <a:ext cx="3145536" cy="237744"/>
+            <a:ext cx="3145536" cy="219456"/>
           </a:xfrm>
           <a:prstGeom prst="rect">
             <a:avLst/>
@@ -18799,12 +18799,12 @@
         </p:nvSpPr>
         <p:spPr>
           <a:xfrm>
-            <a:off x="4338828" y="4837176"/>
-            <a:ext cx="3511296" cy="612648"/>
+            <a:off x="4338828" y="4507992"/>
+            <a:ext cx="3511296" cy="521208"/>
           </a:xfrm>
           <a:prstGeom prst="roundRect">
             <a:avLst>
-              <a:gd name="adj" fmla="val 11940"/>
+              <a:gd name="adj" fmla="val 14035"/>
             </a:avLst>
           </a:prstGeom>
           <a:solidFill>
@@ -18821,8 +18821,8 @@
         </p:nvSpPr>
         <p:spPr>
           <a:xfrm>
-            <a:off x="4521708" y="4892040"/>
-            <a:ext cx="3145536" cy="274320"/>
+            <a:off x="4521708" y="4544568"/>
+            <a:ext cx="3145536" cy="256032"/>
           </a:xfrm>
           <a:prstGeom prst="rect">
             <a:avLst/>
@@ -18857,8 +18857,8 @@
         </p:nvSpPr>
         <p:spPr>
           <a:xfrm>
-            <a:off x="4521708" y="5157216"/>
-            <a:ext cx="3145536" cy="237744"/>
+            <a:off x="4521708" y="4782312"/>
+            <a:ext cx="3145536" cy="219456"/>
           </a:xfrm>
           <a:prstGeom prst="rect">
             <a:avLst/>
@@ -18893,12 +18893,12 @@
         </p:nvSpPr>
         <p:spPr>
           <a:xfrm>
-            <a:off x="4338828" y="5550408"/>
-            <a:ext cx="3511296" cy="612648"/>
+            <a:off x="4338828" y="5111496"/>
+            <a:ext cx="3511296" cy="521208"/>
           </a:xfrm>
           <a:prstGeom prst="roundRect">
             <a:avLst>
-              <a:gd name="adj" fmla="val 11940"/>
+              <a:gd name="adj" fmla="val 14035"/>
             </a:avLst>
           </a:prstGeom>
           <a:solidFill>
@@ -18915,8 +18915,8 @@
         </p:nvSpPr>
         <p:spPr>
           <a:xfrm>
-            <a:off x="4521708" y="5605272"/>
-            <a:ext cx="3145536" cy="274320"/>
+            <a:off x="4521708" y="5148072"/>
+            <a:ext cx="3145536" cy="256032"/>
           </a:xfrm>
           <a:prstGeom prst="rect">
             <a:avLst/>
@@ -18951,8 +18951,8 @@
         </p:nvSpPr>
         <p:spPr>
           <a:xfrm>
-            <a:off x="4521708" y="5870448"/>
-            <a:ext cx="3145536" cy="237744"/>
+            <a:off x="4521708" y="5385816"/>
+            <a:ext cx="3145536" cy="219456"/>
           </a:xfrm>
           <a:prstGeom prst="rect">
             <a:avLst/>
@@ -19067,7 +19067,7 @@
                   <a:schemeClr val="bg1"/>
                 </a:solidFill>
               </a:rPr>
-              <a:t>5 families  |  15 objects  |  85 attributes</a:t>
+              <a:t>6 families  |  17 objects  |  105 attributes</a:t>
             </a:r>
             <a:endParaRPr lang="en-US" sz="1200" dirty="0"/>
           </a:p>
@@ -19082,11 +19082,11 @@
         <p:spPr>
           <a:xfrm>
             <a:off x="8129016" y="2697480"/>
-            <a:ext cx="3511296" cy="612648"/>
+            <a:ext cx="3511296" cy="521208"/>
           </a:xfrm>
           <a:prstGeom prst="roundRect">
             <a:avLst>
-              <a:gd name="adj" fmla="val 11940"/>
+              <a:gd name="adj" fmla="val 14035"/>
             </a:avLst>
           </a:prstGeom>
           <a:solidFill>
@@ -19103,8 +19103,8 @@
         </p:nvSpPr>
         <p:spPr>
           <a:xfrm>
-            <a:off x="8311896" y="2752344"/>
-            <a:ext cx="3145536" cy="274320"/>
+            <a:off x="8311896" y="2734056"/>
+            <a:ext cx="3145536" cy="256032"/>
           </a:xfrm>
           <a:prstGeom prst="rect">
             <a:avLst/>
@@ -19139,8 +19139,8 @@
         </p:nvSpPr>
         <p:spPr>
           <a:xfrm>
-            <a:off x="8311896" y="3017520"/>
-            <a:ext cx="3145536" cy="237744"/>
+            <a:off x="8311896" y="2971800"/>
+            <a:ext cx="3145536" cy="219456"/>
           </a:xfrm>
           <a:prstGeom prst="rect">
             <a:avLst/>
@@ -19175,12 +19175,12 @@
         </p:nvSpPr>
         <p:spPr>
           <a:xfrm>
-            <a:off x="8129016" y="3410712"/>
-            <a:ext cx="3511296" cy="612648"/>
+            <a:off x="8129016" y="3300984"/>
+            <a:ext cx="3511296" cy="521208"/>
           </a:xfrm>
           <a:prstGeom prst="roundRect">
             <a:avLst>
-              <a:gd name="adj" fmla="val 11940"/>
+              <a:gd name="adj" fmla="val 14035"/>
             </a:avLst>
           </a:prstGeom>
           <a:solidFill>
@@ -19197,8 +19197,8 @@
         </p:nvSpPr>
         <p:spPr>
           <a:xfrm>
-            <a:off x="8311896" y="3465576"/>
-            <a:ext cx="3145536" cy="274320"/>
+            <a:off x="8311896" y="3337560"/>
+            <a:ext cx="3145536" cy="256032"/>
           </a:xfrm>
           <a:prstGeom prst="rect">
             <a:avLst/>
@@ -19233,8 +19233,8 @@
         </p:nvSpPr>
         <p:spPr>
           <a:xfrm>
-            <a:off x="8311896" y="3730752"/>
-            <a:ext cx="3145536" cy="237744"/>
+            <a:off x="8311896" y="3575304"/>
+            <a:ext cx="3145536" cy="219456"/>
           </a:xfrm>
           <a:prstGeom prst="rect">
             <a:avLst/>
@@ -19269,12 +19269,12 @@
         </p:nvSpPr>
         <p:spPr>
           <a:xfrm>
-            <a:off x="8129016" y="4123944"/>
-            <a:ext cx="3511296" cy="612648"/>
+            <a:off x="8129016" y="3904488"/>
+            <a:ext cx="3511296" cy="521208"/>
           </a:xfrm>
           <a:prstGeom prst="roundRect">
             <a:avLst>
-              <a:gd name="adj" fmla="val 11940"/>
+              <a:gd name="adj" fmla="val 14035"/>
             </a:avLst>
           </a:prstGeom>
           <a:solidFill>
@@ -19291,44 +19291,44 @@
         </p:nvSpPr>
         <p:spPr>
           <a:xfrm>
+            <a:off x="8311896" y="3941064"/>
+            <a:ext cx="3145536" cy="256032"/>
+          </a:xfrm>
+          <a:prstGeom prst="rect">
+            <a:avLst/>
+          </a:prstGeom>
+          <a:noFill/>
+          <a:ln/>
+        </p:spPr>
+        <p:txBody>
+          <a:bodyPr wrap="square" lIns="0" tIns="0" rIns="0" bIns="0" rtlCol="0" anchor="ctr"/>
+          <a:lstStyle/>
+          <a:p>
+            <a:pPr algn="l" indent="0" marL="0">
+              <a:buNone/>
+            </a:pPr>
+            <a:r>
+              <a:rPr lang="en-US" sz="1300" b="1" dirty="0">
+                <a:solidFill>
+                  <a:schemeClr val="tx1"/>
+                </a:solidFill>
+              </a:rPr>
+              <a:t>Distribution &amp; Registration</a:t>
+            </a:r>
+            <a:endParaRPr lang="en-US" sz="1300" dirty="0"/>
+          </a:p>
+        </p:txBody>
+      </p:sp>
+      <p:sp>
+        <p:nvSpPr>
+          <p:cNvPr id="46" name="Text 43"/>
+          <p:cNvSpPr txBox="1"/>
+          <p:nvPr/>
+        </p:nvSpPr>
+        <p:spPr>
+          <a:xfrm>
             <a:off x="8311896" y="4178808"/>
-            <a:ext cx="3145536" cy="274320"/>
-          </a:xfrm>
-          <a:prstGeom prst="rect">
-            <a:avLst/>
-          </a:prstGeom>
-          <a:noFill/>
-          <a:ln/>
-        </p:spPr>
-        <p:txBody>
-          <a:bodyPr wrap="square" lIns="0" tIns="0" rIns="0" bIns="0" rtlCol="0" anchor="ctr"/>
-          <a:lstStyle/>
-          <a:p>
-            <a:pPr algn="l" indent="0" marL="0">
-              <a:buNone/>
-            </a:pPr>
-            <a:r>
-              <a:rPr lang="en-US" sz="1300" b="1" dirty="0">
-                <a:solidFill>
-                  <a:schemeClr val="tx1"/>
-                </a:solidFill>
-              </a:rPr>
-              <a:t>Distribution &amp; Registration</a:t>
-            </a:r>
-            <a:endParaRPr lang="en-US" sz="1300" dirty="0"/>
-          </a:p>
-        </p:txBody>
-      </p:sp>
-      <p:sp>
-        <p:nvSpPr>
-          <p:cNvPr id="46" name="Text 43"/>
-          <p:cNvSpPr txBox="1"/>
-          <p:nvPr/>
-        </p:nvSpPr>
-        <p:spPr>
-          <a:xfrm>
-            <a:off x="8311896" y="4443984"/>
-            <a:ext cx="3145536" cy="237744"/>
+            <a:ext cx="3145536" cy="219456"/>
           </a:xfrm>
           <a:prstGeom prst="rect">
             <a:avLst/>
@@ -19363,12 +19363,12 @@
         </p:nvSpPr>
         <p:spPr>
           <a:xfrm>
-            <a:off x="8129016" y="4837176"/>
-            <a:ext cx="3511296" cy="612648"/>
+            <a:off x="8129016" y="4507992"/>
+            <a:ext cx="3511296" cy="521208"/>
           </a:xfrm>
           <a:prstGeom prst="roundRect">
             <a:avLst>
-              <a:gd name="adj" fmla="val 11940"/>
+              <a:gd name="adj" fmla="val 14035"/>
             </a:avLst>
           </a:prstGeom>
           <a:solidFill>
@@ -19385,8 +19385,8 @@
         </p:nvSpPr>
         <p:spPr>
           <a:xfrm>
-            <a:off x="8311896" y="4892040"/>
-            <a:ext cx="3145536" cy="274320"/>
+            <a:off x="8311896" y="4544568"/>
+            <a:ext cx="3145536" cy="256032"/>
           </a:xfrm>
           <a:prstGeom prst="rect">
             <a:avLst/>
@@ -19421,8 +19421,8 @@
         </p:nvSpPr>
         <p:spPr>
           <a:xfrm>
-            <a:off x="8311896" y="5157216"/>
-            <a:ext cx="3145536" cy="237744"/>
+            <a:off x="8311896" y="4782312"/>
+            <a:ext cx="3145536" cy="219456"/>
           </a:xfrm>
           <a:prstGeom prst="rect">
             <a:avLst/>
@@ -19457,12 +19457,12 @@
         </p:nvSpPr>
         <p:spPr>
           <a:xfrm>
-            <a:off x="8129016" y="5550408"/>
-            <a:ext cx="3511296" cy="612648"/>
+            <a:off x="8129016" y="5111496"/>
+            <a:ext cx="3511296" cy="521208"/>
           </a:xfrm>
           <a:prstGeom prst="roundRect">
             <a:avLst>
-              <a:gd name="adj" fmla="val 11940"/>
+              <a:gd name="adj" fmla="val 14035"/>
             </a:avLst>
           </a:prstGeom>
           <a:solidFill>
@@ -19479,8 +19479,8 @@
         </p:nvSpPr>
         <p:spPr>
           <a:xfrm>
-            <a:off x="8311896" y="5605272"/>
-            <a:ext cx="3145536" cy="274320"/>
+            <a:off x="8311896" y="5148072"/>
+            <a:ext cx="3145536" cy="256032"/>
           </a:xfrm>
           <a:prstGeom prst="rect">
             <a:avLst/>
@@ -19501,6 +19501,100 @@
                   <a:schemeClr val="tx1"/>
                 </a:solidFill>
               </a:rPr>
+              <a:t>Investment Commentary</a:t>
+            </a:r>
+            <a:endParaRPr lang="en-US" sz="1300" dirty="0"/>
+          </a:p>
+        </p:txBody>
+      </p:sp>
+      <p:sp>
+        <p:nvSpPr>
+          <p:cNvPr id="52" name="Text 49"/>
+          <p:cNvSpPr txBox="1"/>
+          <p:nvPr/>
+        </p:nvSpPr>
+        <p:spPr>
+          <a:xfrm>
+            <a:off x="8311896" y="5385816"/>
+            <a:ext cx="3145536" cy="219456"/>
+          </a:xfrm>
+          <a:prstGeom prst="rect">
+            <a:avLst/>
+          </a:prstGeom>
+          <a:noFill/>
+          <a:ln/>
+        </p:spPr>
+        <p:txBody>
+          <a:bodyPr wrap="square" lIns="0" tIns="0" rIns="0" bIns="0" rtlCol="0" anchor="ctr"/>
+          <a:lstStyle/>
+          <a:p>
+            <a:pPr algn="l" indent="0" marL="0">
+              <a:buNone/>
+            </a:pPr>
+            <a:r>
+              <a:rPr lang="en-US" sz="1100" dirty="0">
+                <a:solidFill>
+                  <a:schemeClr val="tx2"/>
+                </a:solidFill>
+              </a:rPr>
+              <a:t>2 objects  |  20 attributes  |  8 critical</a:t>
+            </a:r>
+            <a:endParaRPr lang="en-US" sz="1100" dirty="0"/>
+          </a:p>
+        </p:txBody>
+      </p:sp>
+      <p:sp>
+        <p:nvSpPr>
+          <p:cNvPr id="53" name="Shape 50"/>
+          <p:cNvSpPr/>
+          <p:nvPr/>
+        </p:nvSpPr>
+        <p:spPr>
+          <a:xfrm>
+            <a:off x="8129016" y="5715000"/>
+            <a:ext cx="3511296" cy="521208"/>
+          </a:xfrm>
+          <a:prstGeom prst="roundRect">
+            <a:avLst>
+              <a:gd name="adj" fmla="val 14035"/>
+            </a:avLst>
+          </a:prstGeom>
+          <a:solidFill>
+            <a:schemeClr val="bg2"/>
+          </a:solidFill>
+          <a:ln/>
+        </p:spPr>
+      </p:sp>
+      <p:sp>
+        <p:nvSpPr>
+          <p:cNvPr id="54" name="Text 51"/>
+          <p:cNvSpPr txBox="1"/>
+          <p:nvPr/>
+        </p:nvSpPr>
+        <p:spPr>
+          <a:xfrm>
+            <a:off x="8311896" y="5751576"/>
+            <a:ext cx="3145536" cy="256032"/>
+          </a:xfrm>
+          <a:prstGeom prst="rect">
+            <a:avLst/>
+          </a:prstGeom>
+          <a:noFill/>
+          <a:ln/>
+        </p:spPr>
+        <p:txBody>
+          <a:bodyPr wrap="square" lIns="0" tIns="0" rIns="0" bIns="0" rtlCol="0" anchor="ctr"/>
+          <a:lstStyle/>
+          <a:p>
+            <a:pPr algn="l" indent="0" marL="0">
+              <a:buNone/>
+            </a:pPr>
+            <a:r>
+              <a:rPr lang="en-US" sz="1300" b="1" dirty="0">
+                <a:solidFill>
+                  <a:schemeClr val="tx1"/>
+                </a:solidFill>
+              </a:rPr>
               <a:t>Lifecycle &amp; Governance</a:t>
             </a:r>
             <a:endParaRPr lang="en-US" sz="1300" dirty="0"/>
@@ -19509,14 +19603,14 @@
       </p:sp>
       <p:sp>
         <p:nvSpPr>
-          <p:cNvPr id="52" name="Text 49"/>
-          <p:cNvSpPr txBox="1"/>
-          <p:nvPr/>
-        </p:nvSpPr>
-        <p:spPr>
-          <a:xfrm>
-            <a:off x="8311896" y="5870448"/>
-            <a:ext cx="3145536" cy="237744"/>
+          <p:cNvPr id="55" name="Text 52"/>
+          <p:cNvSpPr txBox="1"/>
+          <p:nvPr/>
+        </p:nvSpPr>
+        <p:spPr>
+          <a:xfrm>
+            <a:off x="8311896" y="5989320"/>
+            <a:ext cx="3145536" cy="219456"/>
           </a:xfrm>
           <a:prstGeom prst="rect">
             <a:avLst/>
@@ -19545,13 +19639,13 @@
       </p:sp>
       <p:sp>
         <p:nvSpPr>
-          <p:cNvPr id="53" name="Text 50"/>
-          <p:cNvSpPr txBox="1"/>
-          <p:nvPr/>
-        </p:nvSpPr>
-        <p:spPr>
-          <a:xfrm>
-            <a:off x="548640" y="4974336"/>
+          <p:cNvPr id="56" name="Text 53"/>
+          <p:cNvSpPr txBox="1"/>
+          <p:nvPr/>
+        </p:nvSpPr>
+        <p:spPr>
+          <a:xfrm>
+            <a:off x="548640" y="4645152"/>
             <a:ext cx="3511296" cy="914400"/>
           </a:xfrm>
           <a:prstGeom prst="rect">
@@ -22452,7 +22546,7 @@
                   </a:tcPr>
                 </a:tc>
               </a:tr>
-              <a:tr h="749808">
+              <a:tr h="640080">
                 <a:tc>
                   <a:txBody>
                     <a:bodyPr/>
@@ -22661,7 +22755,7 @@
                   </a:tcPr>
                 </a:tc>
               </a:tr>
-              <a:tr h="749808">
+              <a:tr h="640080">
                 <a:tc>
                   <a:txBody>
                     <a:bodyPr/>
@@ -22848,7 +22942,7 @@
                   </a:tcPr>
                 </a:tc>
               </a:tr>
-              <a:tr h="749808">
+              <a:tr h="640080">
                 <a:tc>
                   <a:txBody>
                     <a:bodyPr/>
@@ -23046,7 +23140,7 @@
                   </a:tcPr>
                 </a:tc>
               </a:tr>
-              <a:tr h="749808">
+              <a:tr h="640080">
                 <a:tc>
                   <a:txBody>
                     <a:bodyPr/>
@@ -23255,7 +23349,194 @@
                   </a:tcPr>
                 </a:tc>
               </a:tr>
-              <a:tr h="749808">
+              <a:tr h="640080">
+                <a:tc>
+                  <a:txBody>
+                    <a:bodyPr/>
+                    <a:lstStyle/>
+                    <a:p>
+                      <a:pPr indent="0" marL="0">
+                        <a:buNone/>
+                      </a:pPr>
+                      <a:r>
+                        <a:rPr lang="en-US" sz="1200" b="1" dirty="0">
+                          <a:solidFill>
+                            <a:schemeClr val="tx1"/>
+                          </a:solidFill>
+                        </a:rPr>
+                        <a:t>Investment Commentary</a:t>
+                      </a:r>
+                      <a:endParaRPr lang="en-US" sz="1200" dirty="0"/>
+                    </a:p>
+                    <a:p>
+                      <a:pPr indent="0" marL="0">
+                        <a:buNone/>
+                      </a:pPr>
+                      <a:r>
+                        <a:rPr lang="en-US" sz="1100" dirty="0">
+                          <a:solidFill>
+                            <a:schemeClr val="tx2"/>
+                          </a:solidFill>
+                        </a:rPr>
+                        <a:t>2 objects  |  20 attributes</a:t>
+                      </a:r>
+                      <a:endParaRPr lang="en-US" sz="1200" dirty="0"/>
+                    </a:p>
+                  </a:txBody>
+                  <a:tcPr marL="91440" marR="91440" marT="45720" marB="45720" anchor="ctr">
+                    <a:lnL w="0" cap="flat" cmpd="sng" algn="ctr">
+                      <a:noFill/>
+                    </a:lnL>
+                    <a:lnR w="0" cap="flat" cmpd="sng" algn="ctr">
+                      <a:noFill/>
+                    </a:lnR>
+                    <a:lnT w="0" cap="flat" cmpd="sng" algn="ctr">
+                      <a:noFill/>
+                    </a:lnT>
+                    <a:lnB w="9525" cap="flat" cmpd="sng" algn="ctr">
+                      <a:solidFill>
+                        <a:srgbClr val="D5D9E1"/>
+                      </a:solidFill>
+                      <a:prstDash val="solid"/>
+                      <a:round/>
+                      <a:headEnd type="none" w="med" len="med"/>
+                      <a:tailEnd type="none" w="med" len="med"/>
+                    </a:lnB>
+                  </a:tcPr>
+                </a:tc>
+                <a:tc>
+                  <a:txBody>
+                    <a:bodyPr/>
+                    <a:lstStyle/>
+                    <a:p>
+                      <a:pPr indent="0" marL="0">
+                        <a:buNone/>
+                      </a:pPr>
+                      <a:r>
+                        <a:rPr lang="en-US" sz="1200" dirty="0">
+                          <a:solidFill>
+                            <a:schemeClr val="tx1"/>
+                          </a:solidFill>
+                        </a:rPr>
+                        <a:t>Market and investment commentary by the investment teams, per subject and period</a:t>
+                      </a:r>
+                      <a:endParaRPr lang="en-US" sz="1200" dirty="0"/>
+                    </a:p>
+                  </a:txBody>
+                  <a:tcPr marL="91440" marR="91440" marT="45720" marB="45720" anchor="ctr">
+                    <a:lnL w="0" cap="flat" cmpd="sng" algn="ctr">
+                      <a:noFill/>
+                    </a:lnL>
+                    <a:lnR w="0" cap="flat" cmpd="sng" algn="ctr">
+                      <a:noFill/>
+                    </a:lnR>
+                    <a:lnT w="0" cap="flat" cmpd="sng" algn="ctr">
+                      <a:noFill/>
+                    </a:lnT>
+                    <a:lnB w="9525" cap="flat" cmpd="sng" algn="ctr">
+                      <a:solidFill>
+                        <a:srgbClr val="D5D9E1"/>
+                      </a:solidFill>
+                      <a:prstDash val="solid"/>
+                      <a:round/>
+                      <a:headEnd type="none" w="med" len="med"/>
+                      <a:tailEnd type="none" w="med" len="med"/>
+                    </a:lnB>
+                  </a:tcPr>
+                </a:tc>
+                <a:tc>
+                  <a:txBody>
+                    <a:bodyPr/>
+                    <a:lstStyle/>
+                    <a:p>
+                      <a:pPr indent="0" marL="0">
+                        <a:buNone/>
+                      </a:pPr>
+                      <a:r>
+                        <a:rPr lang="en-US" sz="1200" b="1" dirty="0">
+                          <a:solidFill>
+                            <a:schemeClr val="tx1"/>
+                          </a:solidFill>
+                        </a:rPr>
+                        <a:t>Investment Commentary, </a:t>
+                      </a:r>
+                      <a:pPr indent="0" marL="0">
+                        <a:buNone/>
+                      </a:pPr>
+                      <a:r>
+                        <a:rPr lang="en-US" sz="1200" dirty="0">
+                          <a:solidFill>
+                            <a:schemeClr val="tx1"/>
+                          </a:solidFill>
+                        </a:rPr>
+                        <a:t>Commentary Approval</a:t>
+                      </a:r>
+                      <a:endParaRPr lang="en-US" sz="1200" dirty="0"/>
+                    </a:p>
+                  </a:txBody>
+                  <a:tcPr marL="91440" marR="91440" marT="45720" marB="45720" anchor="ctr">
+                    <a:lnL w="0" cap="flat" cmpd="sng" algn="ctr">
+                      <a:noFill/>
+                    </a:lnL>
+                    <a:lnR w="0" cap="flat" cmpd="sng" algn="ctr">
+                      <a:noFill/>
+                    </a:lnR>
+                    <a:lnT w="0" cap="flat" cmpd="sng" algn="ctr">
+                      <a:noFill/>
+                    </a:lnT>
+                    <a:lnB w="9525" cap="flat" cmpd="sng" algn="ctr">
+                      <a:solidFill>
+                        <a:srgbClr val="D5D9E1"/>
+                      </a:solidFill>
+                      <a:prstDash val="solid"/>
+                      <a:round/>
+                      <a:headEnd type="none" w="med" len="med"/>
+                      <a:tailEnd type="none" w="med" len="med"/>
+                    </a:lnB>
+                  </a:tcPr>
+                </a:tc>
+                <a:tc>
+                  <a:txBody>
+                    <a:bodyPr/>
+                    <a:lstStyle/>
+                    <a:p>
+                      <a:pPr indent="0" marL="0">
+                        <a:buNone/>
+                      </a:pPr>
+                      <a:r>
+                        <a:rPr lang="en-US" sz="1200" dirty="0">
+                          <a:solidFill>
+                            <a:schemeClr val="tx1"/>
+                          </a:solidFill>
+                        </a:rPr>
+                        <a:t>Commentary Type, Commentary Scope, Period End Date, Permitted Audience</a:t>
+                      </a:r>
+                      <a:endParaRPr lang="en-US" sz="1200" dirty="0"/>
+                    </a:p>
+                  </a:txBody>
+                  <a:tcPr marL="91440" marR="91440" marT="45720" marB="45720" anchor="ctr">
+                    <a:lnL w="0" cap="flat" cmpd="sng" algn="ctr">
+                      <a:noFill/>
+                    </a:lnL>
+                    <a:lnR w="0" cap="flat" cmpd="sng" algn="ctr">
+                      <a:noFill/>
+                    </a:lnR>
+                    <a:lnT w="0" cap="flat" cmpd="sng" algn="ctr">
+                      <a:noFill/>
+                    </a:lnT>
+                    <a:lnB w="9525" cap="flat" cmpd="sng" algn="ctr">
+                      <a:solidFill>
+                        <a:srgbClr val="D5D9E1"/>
+                      </a:solidFill>
+                      <a:prstDash val="solid"/>
+                      <a:round/>
+                      <a:headEnd type="none" w="med" len="med"/>
+                      <a:tailEnd type="none" w="med" len="med"/>
+                    </a:lnB>
+                  </a:tcPr>
+                </a:tc>
+              </a:tr>
+              <a:tr h="640080">
                 <a:tc>
                   <a:txBody>
                     <a:bodyPr/>
@@ -23454,7 +23735,7 @@
         </p:nvSpPr>
         <p:spPr>
           <a:xfrm>
-            <a:off x="548640" y="5961888"/>
+            <a:off x="548640" y="6053328"/>
             <a:ext cx="11091672" cy="274320"/>
           </a:xfrm>
           <a:prstGeom prst="rect">
@@ -23732,7 +24013,7 @@
                   <a:schemeClr val="accent1"/>
                 </a:solidFill>
               </a:rPr>
-              <a:t>64%</a:t>
+              <a:t>60%</a:t>
             </a:r>
             <a:endParaRPr lang="en-US" sz="3200" dirty="0"/>
           </a:p>
@@ -23768,7 +24049,7 @@
                   <a:schemeClr val="tx1"/>
                 </a:solidFill>
               </a:rPr>
-              <a:t>of attributes (183 of 287) align to an external standard or regulation</a:t>
+              <a:t>of attributes (183 of 307) align to an external standard or regulation</a:t>
             </a:r>
             <a:endParaRPr lang="en-US" sz="1300" dirty="0"/>
           </a:p>
@@ -23826,7 +24107,7 @@
                   <a:schemeClr val="accent1"/>
                 </a:solidFill>
               </a:rPr>
-              <a:t>94</a:t>
+              <a:t>101</a:t>
             </a:r>
             <a:endParaRPr lang="en-US" sz="3200" dirty="0"/>
           </a:p>
